--- a/PBL PPT.pptx
+++ b/PBL PPT.pptx
@@ -6,16 +6,21 @@
   </p:sldMasterIdLst>
   <p:sldIdLst>
     <p:sldId id="268" r:id="rId2"/>
-    <p:sldId id="257" r:id="rId3"/>
-    <p:sldId id="258" r:id="rId4"/>
+    <p:sldId id="269" r:id="rId3"/>
+    <p:sldId id="257" r:id="rId4"/>
     <p:sldId id="259" r:id="rId5"/>
     <p:sldId id="260" r:id="rId6"/>
     <p:sldId id="261" r:id="rId7"/>
-    <p:sldId id="262" r:id="rId8"/>
-    <p:sldId id="263" r:id="rId9"/>
-    <p:sldId id="265" r:id="rId10"/>
-    <p:sldId id="266" r:id="rId11"/>
-    <p:sldId id="267" r:id="rId12"/>
+    <p:sldId id="263" r:id="rId8"/>
+    <p:sldId id="262" r:id="rId9"/>
+    <p:sldId id="270" r:id="rId10"/>
+    <p:sldId id="271" r:id="rId11"/>
+    <p:sldId id="272" r:id="rId12"/>
+    <p:sldId id="274" r:id="rId13"/>
+    <p:sldId id="265" r:id="rId14"/>
+    <p:sldId id="273" r:id="rId15"/>
+    <p:sldId id="266" r:id="rId16"/>
+    <p:sldId id="267" r:id="rId17"/>
   </p:sldIdLst>
   <p:sldSz cx="9144000" cy="6858000" type="screen4x3"/>
   <p:notesSz cx="6858000" cy="9144000"/>
@@ -272,7 +277,7 @@
           <a:p>
             <a:fld id="{5BCAD085-E8A6-8845-BD4E-CB4CCA059FC4}" type="datetimeFigureOut">
               <a:rPr lang="en-US" smtClean="0"/>
-              <a:t>11/19/2025</a:t>
+              <a:t>2/18/2026</a:t>
             </a:fld>
             <a:endParaRPr lang="en-US"/>
           </a:p>
@@ -514,7 +519,7 @@
           <a:p>
             <a:fld id="{5BCAD085-E8A6-8845-BD4E-CB4CCA059FC4}" type="datetimeFigureOut">
               <a:rPr lang="en-US" smtClean="0"/>
-              <a:t>11/19/2025</a:t>
+              <a:t>2/18/2026</a:t>
             </a:fld>
             <a:endParaRPr lang="en-US"/>
           </a:p>
@@ -698,7 +703,7 @@
           <a:p>
             <a:fld id="{5BCAD085-E8A6-8845-BD4E-CB4CCA059FC4}" type="datetimeFigureOut">
               <a:rPr lang="en-US" smtClean="0"/>
-              <a:t>11/19/2025</a:t>
+              <a:t>2/18/2026</a:t>
             </a:fld>
             <a:endParaRPr lang="en-US"/>
           </a:p>
@@ -899,7 +904,7 @@
           <a:p>
             <a:fld id="{5BCAD085-E8A6-8845-BD4E-CB4CCA059FC4}" type="datetimeFigureOut">
               <a:rPr lang="en-US" smtClean="0"/>
-              <a:t>11/19/2025</a:t>
+              <a:t>2/18/2026</a:t>
             </a:fld>
             <a:endParaRPr lang="en-US"/>
           </a:p>
@@ -1178,7 +1183,7 @@
           <a:p>
             <a:fld id="{5BCAD085-E8A6-8845-BD4E-CB4CCA059FC4}" type="datetimeFigureOut">
               <a:rPr lang="en-US" smtClean="0"/>
-              <a:t>11/19/2025</a:t>
+              <a:t>2/18/2026</a:t>
             </a:fld>
             <a:endParaRPr lang="en-US"/>
           </a:p>
@@ -1446,7 +1451,7 @@
           <a:p>
             <a:fld id="{5BCAD085-E8A6-8845-BD4E-CB4CCA059FC4}" type="datetimeFigureOut">
               <a:rPr lang="en-US" smtClean="0"/>
-              <a:t>11/19/2025</a:t>
+              <a:t>2/18/2026</a:t>
             </a:fld>
             <a:endParaRPr lang="en-US"/>
           </a:p>
@@ -1893,7 +1898,7 @@
           <a:p>
             <a:fld id="{5BCAD085-E8A6-8845-BD4E-CB4CCA059FC4}" type="datetimeFigureOut">
               <a:rPr lang="en-US" smtClean="0"/>
-              <a:t>11/19/2025</a:t>
+              <a:t>2/18/2026</a:t>
             </a:fld>
             <a:endParaRPr lang="en-US"/>
           </a:p>
@@ -2042,7 +2047,7 @@
           <a:p>
             <a:fld id="{5BCAD085-E8A6-8845-BD4E-CB4CCA059FC4}" type="datetimeFigureOut">
               <a:rPr lang="en-US" smtClean="0"/>
-              <a:t>11/19/2025</a:t>
+              <a:t>2/18/2026</a:t>
             </a:fld>
             <a:endParaRPr lang="en-US"/>
           </a:p>
@@ -2137,7 +2142,7 @@
           <a:p>
             <a:fld id="{5BCAD085-E8A6-8845-BD4E-CB4CCA059FC4}" type="datetimeFigureOut">
               <a:rPr lang="en-US" smtClean="0"/>
-              <a:t>11/19/2025</a:t>
+              <a:t>2/18/2026</a:t>
             </a:fld>
             <a:endParaRPr lang="en-US"/>
           </a:p>
@@ -2390,7 +2395,7 @@
           <a:p>
             <a:fld id="{5BCAD085-E8A6-8845-BD4E-CB4CCA059FC4}" type="datetimeFigureOut">
               <a:rPr lang="en-US" smtClean="0"/>
-              <a:t>11/19/2025</a:t>
+              <a:t>2/18/2026</a:t>
             </a:fld>
             <a:endParaRPr lang="en-US"/>
           </a:p>
@@ -2835,7 +2840,7 @@
           <a:p>
             <a:fld id="{5BCAD085-E8A6-8845-BD4E-CB4CCA059FC4}" type="datetimeFigureOut">
               <a:rPr lang="en-US" smtClean="0"/>
-              <a:t>11/19/2025</a:t>
+              <a:t>2/18/2026</a:t>
             </a:fld>
             <a:endParaRPr lang="en-US"/>
           </a:p>
@@ -3206,7 +3211,7 @@
           <a:p>
             <a:fld id="{5BCAD085-E8A6-8845-BD4E-CB4CCA059FC4}" type="datetimeFigureOut">
               <a:rPr lang="en-US" smtClean="0"/>
-              <a:t>11/19/2025</a:t>
+              <a:t>2/18/2026</a:t>
             </a:fld>
             <a:endParaRPr lang="en-US"/>
           </a:p>
@@ -4156,7 +4161,13 @@
       </p:grpSpPr>
       <p:sp>
         <p:nvSpPr>
-          <p:cNvPr id="2" name="Title 1"/>
+          <p:cNvPr id="2" name="Title 1">
+            <a:extLst>
+              <a:ext uri="{FF2B5EF4-FFF2-40B4-BE49-F238E27FC236}">
+                <a16:creationId xmlns:a16="http://schemas.microsoft.com/office/drawing/2014/main" id="{D75C72F5-A4F5-C8DE-42C6-65BE640910A8}"/>
+              </a:ext>
+            </a:extLst>
+          </p:cNvPr>
           <p:cNvSpPr>
             <a:spLocks noGrp="1"/>
           </p:cNvSpPr>
@@ -4166,18 +4177,35 @@
         </p:nvSpPr>
         <p:spPr/>
         <p:txBody>
-          <a:bodyPr/>
-          <a:lstStyle/>
-          <a:p>
-            <a:r>
-              <a:t>References</a:t>
-            </a:r>
-          </a:p>
-        </p:txBody>
-      </p:sp>
-      <p:sp>
-        <p:nvSpPr>
-          <p:cNvPr id="3" name="Content Placeholder 2"/>
+          <a:bodyPr>
+            <a:normAutofit fontScale="90000"/>
+          </a:bodyPr>
+          <a:lstStyle/>
+          <a:p>
+            <a:r>
+              <a:rPr lang="en-IN" sz="3600" dirty="0"/>
+              <a:t>Proposed Methodology</a:t>
+            </a:r>
+            <a:br>
+              <a:rPr lang="en-IN" dirty="0"/>
+            </a:br>
+            <a:r>
+              <a:rPr lang="en-US" sz="3100" dirty="0"/>
+              <a:t>Step 2: Loss-Aware Host Selection</a:t>
+            </a:r>
+            <a:endParaRPr lang="en-IN" dirty="0"/>
+          </a:p>
+        </p:txBody>
+      </p:sp>
+      <p:sp>
+        <p:nvSpPr>
+          <p:cNvPr id="3" name="Content Placeholder 2">
+            <a:extLst>
+              <a:ext uri="{FF2B5EF4-FFF2-40B4-BE49-F238E27FC236}">
+                <a16:creationId xmlns:a16="http://schemas.microsoft.com/office/drawing/2014/main" id="{0247EFF5-3D28-6EB9-DE7D-17979DAE9FB8}"/>
+              </a:ext>
+            </a:extLst>
+          </p:cNvPr>
           <p:cNvSpPr>
             <a:spLocks noGrp="1"/>
           </p:cNvSpPr>
@@ -4190,26 +4218,40 @@
           <a:bodyPr/>
           <a:lstStyle/>
           <a:p>
-            <a:endParaRPr/>
-          </a:p>
-          <a:p>
-            <a:r>
-              <a:t>A. U. Rehman et al., 'EEVMC: An Energy Efficient Virtual Machine Consolidation Approach,' IEEE Access, 2024.</a:t>
-            </a:r>
-          </a:p>
-          <a:p>
-            <a:r>
-              <a:t>F. F. Moges, S. L. Abebe, 'Energy-aware VM placement algorithms,' J. Cloud Comput., 2019.</a:t>
-            </a:r>
-          </a:p>
-          <a:p>
-            <a:r>
-              <a:t>R. Medara, 'Dynamic Virtual Machine Consolidation,' Springer, 2023.</a:t>
-            </a:r>
+            <a:r>
+              <a:rPr lang="en-IN" dirty="0"/>
+              <a:t>Evaluate host energy efficiency</a:t>
+            </a:r>
+          </a:p>
+          <a:p>
+            <a:r>
+              <a:rPr lang="en-IN" dirty="0"/>
+              <a:t>Select optimal host for VM placement</a:t>
+            </a:r>
+          </a:p>
+          <a:p>
+            <a:r>
+              <a:rPr lang="en-IN" dirty="0"/>
+              <a:t>Minimize power consumption</a:t>
+            </a:r>
+          </a:p>
+          <a:p>
+            <a:r>
+              <a:rPr lang="en-IN" dirty="0"/>
+              <a:t>EEVMC introduces loss-aware host selection criteria</a:t>
+            </a:r>
+          </a:p>
+          <a:p>
+            <a:endParaRPr lang="en-IN" dirty="0"/>
           </a:p>
         </p:txBody>
       </p:sp>
     </p:spTree>
+    <p:extLst>
+      <p:ext uri="{BB962C8B-B14F-4D97-AF65-F5344CB8AC3E}">
+        <p14:creationId xmlns:p14="http://schemas.microsoft.com/office/powerpoint/2010/main" val="1511409660"/>
+      </p:ext>
+    </p:extLst>
   </p:cSld>
   <p:clrMapOvr>
     <a:masterClrMapping/>
@@ -4236,6 +4278,253 @@
       </p:grpSpPr>
       <p:sp>
         <p:nvSpPr>
+          <p:cNvPr id="2" name="Title 1">
+            <a:extLst>
+              <a:ext uri="{FF2B5EF4-FFF2-40B4-BE49-F238E27FC236}">
+                <a16:creationId xmlns:a16="http://schemas.microsoft.com/office/drawing/2014/main" id="{0A052562-E102-F024-4278-59167653DE2E}"/>
+              </a:ext>
+            </a:extLst>
+          </p:cNvPr>
+          <p:cNvSpPr>
+            <a:spLocks noGrp="1"/>
+          </p:cNvSpPr>
+          <p:nvPr>
+            <p:ph type="title"/>
+          </p:nvPr>
+        </p:nvSpPr>
+        <p:spPr/>
+        <p:txBody>
+          <a:bodyPr/>
+          <a:lstStyle/>
+          <a:p>
+            <a:r>
+              <a:rPr lang="en-US" dirty="0"/>
+              <a:t>Proposed Methodology </a:t>
+            </a:r>
+            <a:br>
+              <a:rPr lang="en-US" dirty="0"/>
+            </a:br>
+            <a:r>
+              <a:rPr lang="en-US" sz="2800" dirty="0"/>
+              <a:t>Step 3: VM Consolidation</a:t>
+            </a:r>
+            <a:endParaRPr lang="en-IN" dirty="0"/>
+          </a:p>
+        </p:txBody>
+      </p:sp>
+      <p:sp>
+        <p:nvSpPr>
+          <p:cNvPr id="3" name="Content Placeholder 2">
+            <a:extLst>
+              <a:ext uri="{FF2B5EF4-FFF2-40B4-BE49-F238E27FC236}">
+                <a16:creationId xmlns:a16="http://schemas.microsoft.com/office/drawing/2014/main" id="{7D9BE773-5BE0-50BE-E25D-07B0FE9A5464}"/>
+              </a:ext>
+            </a:extLst>
+          </p:cNvPr>
+          <p:cNvSpPr>
+            <a:spLocks noGrp="1"/>
+          </p:cNvSpPr>
+          <p:nvPr>
+            <p:ph idx="1"/>
+          </p:nvPr>
+        </p:nvSpPr>
+        <p:spPr/>
+        <p:txBody>
+          <a:bodyPr/>
+          <a:lstStyle/>
+          <a:p>
+            <a:r>
+              <a:rPr lang="en-US" dirty="0"/>
+              <a:t>Migrate VMs from inefficient hosts</a:t>
+            </a:r>
+          </a:p>
+          <a:p>
+            <a:r>
+              <a:rPr lang="en-US" dirty="0"/>
+              <a:t>Consolidate workloads efficiently</a:t>
+            </a:r>
+          </a:p>
+          <a:p>
+            <a:r>
+              <a:rPr lang="en-US" dirty="0"/>
+              <a:t>Shut down unused servers</a:t>
+            </a:r>
+          </a:p>
+          <a:p>
+            <a:pPr marL="0" indent="0">
+              <a:buNone/>
+            </a:pPr>
+            <a:r>
+              <a:rPr lang="en-US" dirty="0"/>
+              <a:t>    Benefits:</a:t>
+            </a:r>
+          </a:p>
+          <a:p>
+            <a:r>
+              <a:rPr lang="en-US" dirty="0"/>
+              <a:t>Reduced energy consumption</a:t>
+            </a:r>
+          </a:p>
+          <a:p>
+            <a:r>
+              <a:rPr lang="en-US" dirty="0"/>
+              <a:t>Improved efficiency</a:t>
+            </a:r>
+          </a:p>
+          <a:p>
+            <a:endParaRPr lang="en-IN" dirty="0"/>
+          </a:p>
+        </p:txBody>
+      </p:sp>
+    </p:spTree>
+    <p:extLst>
+      <p:ext uri="{BB962C8B-B14F-4D97-AF65-F5344CB8AC3E}">
+        <p14:creationId xmlns:p14="http://schemas.microsoft.com/office/powerpoint/2010/main" val="1378775998"/>
+      </p:ext>
+    </p:extLst>
+  </p:cSld>
+  <p:clrMapOvr>
+    <a:masterClrMapping/>
+  </p:clrMapOvr>
+</p:sld>
+</file>
+
+<file path=ppt/slides/slide12.xml><?xml version="1.0" encoding="utf-8"?>
+<p:sld xmlns:a="http://schemas.openxmlformats.org/drawingml/2006/main" xmlns:r="http://schemas.openxmlformats.org/officeDocument/2006/relationships" xmlns:p="http://schemas.openxmlformats.org/presentationml/2006/main">
+  <p:cSld>
+    <p:spTree>
+      <p:nvGrpSpPr>
+        <p:cNvPr id="1" name=""/>
+        <p:cNvGrpSpPr/>
+        <p:nvPr/>
+      </p:nvGrpSpPr>
+      <p:grpSpPr>
+        <a:xfrm>
+          <a:off x="0" y="0"/>
+          <a:ext cx="0" cy="0"/>
+          <a:chOff x="0" y="0"/>
+          <a:chExt cx="0" cy="0"/>
+        </a:xfrm>
+      </p:grpSpPr>
+      <p:sp>
+        <p:nvSpPr>
+          <p:cNvPr id="2" name="Title 1">
+            <a:extLst>
+              <a:ext uri="{FF2B5EF4-FFF2-40B4-BE49-F238E27FC236}">
+                <a16:creationId xmlns:a16="http://schemas.microsoft.com/office/drawing/2014/main" id="{66091E71-CC76-83EA-703C-924E246DCAF2}"/>
+              </a:ext>
+            </a:extLst>
+          </p:cNvPr>
+          <p:cNvSpPr>
+            <a:spLocks noGrp="1"/>
+          </p:cNvSpPr>
+          <p:nvPr>
+            <p:ph type="title"/>
+          </p:nvPr>
+        </p:nvSpPr>
+        <p:spPr/>
+        <p:txBody>
+          <a:bodyPr>
+            <a:normAutofit fontScale="90000"/>
+          </a:bodyPr>
+          <a:lstStyle/>
+          <a:p>
+            <a:r>
+              <a:rPr lang="en-US" sz="3600" dirty="0"/>
+              <a:t>Proposed Methodology</a:t>
+            </a:r>
+            <a:br>
+              <a:rPr lang="en-US" dirty="0"/>
+            </a:br>
+            <a:r>
+              <a:rPr lang="en-US" sz="3100" dirty="0"/>
+              <a:t>Step 4: Performance Optimization</a:t>
+            </a:r>
+            <a:endParaRPr lang="en-IN" dirty="0"/>
+          </a:p>
+        </p:txBody>
+      </p:sp>
+      <p:sp>
+        <p:nvSpPr>
+          <p:cNvPr id="3" name="Content Placeholder 2">
+            <a:extLst>
+              <a:ext uri="{FF2B5EF4-FFF2-40B4-BE49-F238E27FC236}">
+                <a16:creationId xmlns:a16="http://schemas.microsoft.com/office/drawing/2014/main" id="{444EBC4B-6DE5-56AE-8C8E-CED080D19C77}"/>
+              </a:ext>
+            </a:extLst>
+          </p:cNvPr>
+          <p:cNvSpPr>
+            <a:spLocks noGrp="1"/>
+          </p:cNvSpPr>
+          <p:nvPr>
+            <p:ph idx="1"/>
+          </p:nvPr>
+        </p:nvSpPr>
+        <p:spPr/>
+        <p:txBody>
+          <a:bodyPr/>
+          <a:lstStyle/>
+          <a:p>
+            <a:r>
+              <a:rPr lang="en-US" dirty="0"/>
+              <a:t>Reduced VM migrations</a:t>
+            </a:r>
+          </a:p>
+          <a:p>
+            <a:r>
+              <a:rPr lang="en-US" dirty="0"/>
+              <a:t>Reduced SLA violations</a:t>
+            </a:r>
+          </a:p>
+          <a:p>
+            <a:r>
+              <a:rPr lang="en-US" dirty="0"/>
+              <a:t>Improved system stability</a:t>
+            </a:r>
+          </a:p>
+          <a:p>
+            <a:r>
+              <a:rPr lang="en-US" dirty="0"/>
+              <a:t>Improved host utilization</a:t>
+            </a:r>
+          </a:p>
+          <a:p>
+            <a:endParaRPr lang="en-IN" dirty="0"/>
+          </a:p>
+        </p:txBody>
+      </p:sp>
+    </p:spTree>
+    <p:extLst>
+      <p:ext uri="{BB962C8B-B14F-4D97-AF65-F5344CB8AC3E}">
+        <p14:creationId xmlns:p14="http://schemas.microsoft.com/office/powerpoint/2010/main" val="1820062720"/>
+      </p:ext>
+    </p:extLst>
+  </p:cSld>
+  <p:clrMapOvr>
+    <a:masterClrMapping/>
+  </p:clrMapOvr>
+</p:sld>
+</file>
+
+<file path=ppt/slides/slide13.xml><?xml version="1.0" encoding="utf-8"?>
+<p:sld xmlns:a="http://schemas.openxmlformats.org/drawingml/2006/main" xmlns:r="http://schemas.openxmlformats.org/officeDocument/2006/relationships" xmlns:p="http://schemas.openxmlformats.org/presentationml/2006/main">
+  <p:cSld>
+    <p:spTree>
+      <p:nvGrpSpPr>
+        <p:cNvPr id="1" name=""/>
+        <p:cNvGrpSpPr/>
+        <p:nvPr/>
+      </p:nvGrpSpPr>
+      <p:grpSpPr>
+        <a:xfrm>
+          <a:off x="0" y="0"/>
+          <a:ext cx="0" cy="0"/>
+          <a:chOff x="0" y="0"/>
+          <a:chExt cx="0" cy="0"/>
+        </a:xfrm>
+      </p:grpSpPr>
+      <p:sp>
+        <p:nvSpPr>
           <p:cNvPr id="2" name="Title 1"/>
           <p:cNvSpPr>
             <a:spLocks noGrp="1"/>
@@ -4250,6 +4539,370 @@
           <a:lstStyle/>
           <a:p>
             <a:r>
+              <a:rPr lang="en-IN" dirty="0"/>
+              <a:t>result</a:t>
+            </a:r>
+            <a:endParaRPr dirty="0"/>
+          </a:p>
+        </p:txBody>
+      </p:sp>
+      <p:pic>
+        <p:nvPicPr>
+          <p:cNvPr id="5" name="Content Placeholder 4">
+            <a:extLst>
+              <a:ext uri="{FF2B5EF4-FFF2-40B4-BE49-F238E27FC236}">
+                <a16:creationId xmlns:a16="http://schemas.microsoft.com/office/drawing/2014/main" id="{B4E0914D-68E0-5351-8FBB-79D51507D54C}"/>
+              </a:ext>
+            </a:extLst>
+          </p:cNvPr>
+          <p:cNvPicPr>
+            <a:picLocks noGrp="1" noChangeAspect="1"/>
+          </p:cNvPicPr>
+          <p:nvPr>
+            <p:ph idx="1"/>
+          </p:nvPr>
+        </p:nvPicPr>
+        <p:blipFill>
+          <a:blip r:embed="rId2"/>
+          <a:stretch>
+            <a:fillRect/>
+          </a:stretch>
+        </p:blipFill>
+        <p:spPr>
+          <a:xfrm>
+            <a:off x="1880790" y="2035731"/>
+            <a:ext cx="5696745" cy="1791202"/>
+          </a:xfrm>
+          <a:prstGeom prst="rect">
+            <a:avLst/>
+          </a:prstGeom>
+        </p:spPr>
+      </p:pic>
+      <p:pic>
+        <p:nvPicPr>
+          <p:cNvPr id="7" name="Picture 6">
+            <a:extLst>
+              <a:ext uri="{FF2B5EF4-FFF2-40B4-BE49-F238E27FC236}">
+                <a16:creationId xmlns:a16="http://schemas.microsoft.com/office/drawing/2014/main" id="{D916B73A-6935-4F46-5CC7-4750F488D6D5}"/>
+              </a:ext>
+            </a:extLst>
+          </p:cNvPr>
+          <p:cNvPicPr>
+            <a:picLocks noChangeAspect="1"/>
+          </p:cNvPicPr>
+          <p:nvPr/>
+        </p:nvPicPr>
+        <p:blipFill>
+          <a:blip r:embed="rId3"/>
+          <a:stretch>
+            <a:fillRect/>
+          </a:stretch>
+        </p:blipFill>
+        <p:spPr>
+          <a:xfrm>
+            <a:off x="1757104" y="4008909"/>
+            <a:ext cx="2972058" cy="1455546"/>
+          </a:xfrm>
+          <a:prstGeom prst="rect">
+            <a:avLst/>
+          </a:prstGeom>
+        </p:spPr>
+      </p:pic>
+      <p:pic>
+        <p:nvPicPr>
+          <p:cNvPr id="9" name="Picture 8">
+            <a:extLst>
+              <a:ext uri="{FF2B5EF4-FFF2-40B4-BE49-F238E27FC236}">
+                <a16:creationId xmlns:a16="http://schemas.microsoft.com/office/drawing/2014/main" id="{30521403-31C9-2E65-1E3F-F0745EA4E6C9}"/>
+              </a:ext>
+            </a:extLst>
+          </p:cNvPr>
+          <p:cNvPicPr>
+            <a:picLocks noChangeAspect="1"/>
+          </p:cNvPicPr>
+          <p:nvPr/>
+        </p:nvPicPr>
+        <p:blipFill>
+          <a:blip r:embed="rId4"/>
+          <a:stretch>
+            <a:fillRect/>
+          </a:stretch>
+        </p:blipFill>
+        <p:spPr>
+          <a:xfrm>
+            <a:off x="5084118" y="4024150"/>
+            <a:ext cx="2667231" cy="1440305"/>
+          </a:xfrm>
+          <a:prstGeom prst="rect">
+            <a:avLst/>
+          </a:prstGeom>
+        </p:spPr>
+      </p:pic>
+    </p:spTree>
+  </p:cSld>
+  <p:clrMapOvr>
+    <a:masterClrMapping/>
+  </p:clrMapOvr>
+</p:sld>
+</file>
+
+<file path=ppt/slides/slide14.xml><?xml version="1.0" encoding="utf-8"?>
+<p:sld xmlns:a="http://schemas.openxmlformats.org/drawingml/2006/main" xmlns:r="http://schemas.openxmlformats.org/officeDocument/2006/relationships" xmlns:p="http://schemas.openxmlformats.org/presentationml/2006/main">
+  <p:cSld>
+    <p:spTree>
+      <p:nvGrpSpPr>
+        <p:cNvPr id="1" name=""/>
+        <p:cNvGrpSpPr/>
+        <p:nvPr/>
+      </p:nvGrpSpPr>
+      <p:grpSpPr>
+        <a:xfrm>
+          <a:off x="0" y="0"/>
+          <a:ext cx="0" cy="0"/>
+          <a:chOff x="0" y="0"/>
+          <a:chExt cx="0" cy="0"/>
+        </a:xfrm>
+      </p:grpSpPr>
+      <p:sp>
+        <p:nvSpPr>
+          <p:cNvPr id="2" name="Title 1">
+            <a:extLst>
+              <a:ext uri="{FF2B5EF4-FFF2-40B4-BE49-F238E27FC236}">
+                <a16:creationId xmlns:a16="http://schemas.microsoft.com/office/drawing/2014/main" id="{DE2A19AD-1E5A-46D4-A9EE-2C7B0DB34BB5}"/>
+              </a:ext>
+            </a:extLst>
+          </p:cNvPr>
+          <p:cNvSpPr>
+            <a:spLocks noGrp="1"/>
+          </p:cNvSpPr>
+          <p:nvPr>
+            <p:ph type="title"/>
+          </p:nvPr>
+        </p:nvSpPr>
+        <p:spPr/>
+        <p:txBody>
+          <a:bodyPr/>
+          <a:lstStyle/>
+          <a:p>
+            <a:r>
+              <a:rPr lang="en-IN" dirty="0"/>
+              <a:t>outcome</a:t>
+            </a:r>
+          </a:p>
+        </p:txBody>
+      </p:sp>
+      <p:sp>
+        <p:nvSpPr>
+          <p:cNvPr id="3" name="Content Placeholder 2">
+            <a:extLst>
+              <a:ext uri="{FF2B5EF4-FFF2-40B4-BE49-F238E27FC236}">
+                <a16:creationId xmlns:a16="http://schemas.microsoft.com/office/drawing/2014/main" id="{36C8CF17-C08F-4991-5953-21BA32367452}"/>
+              </a:ext>
+            </a:extLst>
+          </p:cNvPr>
+          <p:cNvSpPr>
+            <a:spLocks noGrp="1"/>
+          </p:cNvSpPr>
+          <p:nvPr>
+            <p:ph idx="1"/>
+          </p:nvPr>
+        </p:nvSpPr>
+        <p:spPr/>
+        <p:txBody>
+          <a:bodyPr/>
+          <a:lstStyle/>
+          <a:p>
+            <a:r>
+              <a:rPr lang="en-IN" dirty="0"/>
+              <a:t>Successfully studied and </a:t>
+            </a:r>
+            <a:r>
+              <a:rPr lang="en-IN" dirty="0" err="1"/>
+              <a:t>analyzed</a:t>
+            </a:r>
+            <a:r>
+              <a:rPr lang="en-IN" dirty="0"/>
+              <a:t> the EEVMC (Energy Efficient Virtual Machine Consolidation) algorithm for cloud energy optimization</a:t>
+            </a:r>
+          </a:p>
+          <a:p>
+            <a:r>
+              <a:rPr lang="en-IN" dirty="0" err="1"/>
+              <a:t>PlanetLab</a:t>
+            </a:r>
+            <a:r>
+              <a:rPr lang="en-IN" dirty="0"/>
+              <a:t> workload dataset integrated to simulate real-world cloud CPU utilization</a:t>
+            </a:r>
+          </a:p>
+          <a:p>
+            <a:endParaRPr lang="en-IN" dirty="0"/>
+          </a:p>
+        </p:txBody>
+      </p:sp>
+    </p:spTree>
+    <p:extLst>
+      <p:ext uri="{BB962C8B-B14F-4D97-AF65-F5344CB8AC3E}">
+        <p14:creationId xmlns:p14="http://schemas.microsoft.com/office/powerpoint/2010/main" val="2514036254"/>
+      </p:ext>
+    </p:extLst>
+  </p:cSld>
+  <p:clrMapOvr>
+    <a:masterClrMapping/>
+  </p:clrMapOvr>
+</p:sld>
+</file>
+
+<file path=ppt/slides/slide15.xml><?xml version="1.0" encoding="utf-8"?>
+<p:sld xmlns:a="http://schemas.openxmlformats.org/drawingml/2006/main" xmlns:r="http://schemas.openxmlformats.org/officeDocument/2006/relationships" xmlns:p="http://schemas.openxmlformats.org/presentationml/2006/main">
+  <p:cSld>
+    <p:spTree>
+      <p:nvGrpSpPr>
+        <p:cNvPr id="1" name=""/>
+        <p:cNvGrpSpPr/>
+        <p:nvPr/>
+      </p:nvGrpSpPr>
+      <p:grpSpPr>
+        <a:xfrm>
+          <a:off x="0" y="0"/>
+          <a:ext cx="0" cy="0"/>
+          <a:chOff x="0" y="0"/>
+          <a:chExt cx="0" cy="0"/>
+        </a:xfrm>
+      </p:grpSpPr>
+      <p:sp>
+        <p:nvSpPr>
+          <p:cNvPr id="2" name="Title 1"/>
+          <p:cNvSpPr>
+            <a:spLocks noGrp="1"/>
+          </p:cNvSpPr>
+          <p:nvPr>
+            <p:ph type="title"/>
+          </p:nvPr>
+        </p:nvSpPr>
+        <p:spPr/>
+        <p:txBody>
+          <a:bodyPr/>
+          <a:lstStyle/>
+          <a:p>
+            <a:r>
+              <a:t>References</a:t>
+            </a:r>
+          </a:p>
+        </p:txBody>
+      </p:sp>
+      <p:sp>
+        <p:nvSpPr>
+          <p:cNvPr id="3" name="Content Placeholder 2"/>
+          <p:cNvSpPr>
+            <a:spLocks noGrp="1"/>
+          </p:cNvSpPr>
+          <p:nvPr>
+            <p:ph idx="1"/>
+          </p:nvPr>
+        </p:nvSpPr>
+        <p:spPr/>
+        <p:txBody>
+          <a:bodyPr>
+            <a:normAutofit fontScale="92500" lnSpcReduction="20000"/>
+          </a:bodyPr>
+          <a:lstStyle/>
+          <a:p>
+            <a:r>
+              <a:rPr lang="en-IN" dirty="0"/>
+              <a:t>Rehman et al. (2024): EEVMC energy-efficient consolidation model.</a:t>
+            </a:r>
+          </a:p>
+          <a:p>
+            <a:r>
+              <a:rPr lang="en-IN" dirty="0"/>
+              <a:t>Moges &amp; Abebe (2019): Energy-aware VM placement algorithms.</a:t>
+            </a:r>
+          </a:p>
+          <a:p>
+            <a:r>
+              <a:rPr lang="en-IN" dirty="0" err="1"/>
+              <a:t>Medara</a:t>
+            </a:r>
+            <a:r>
+              <a:rPr lang="en-IN" dirty="0"/>
+              <a:t> (2023): Dynamic VM Consolidation techniques.</a:t>
+            </a:r>
+          </a:p>
+          <a:p>
+            <a:r>
+              <a:rPr lang="en-IN" dirty="0"/>
+              <a:t>Beloglazov &amp; </a:t>
+            </a:r>
+            <a:r>
+              <a:rPr lang="en-IN" dirty="0" err="1"/>
+              <a:t>Buyya</a:t>
+            </a:r>
+            <a:r>
+              <a:rPr lang="en-IN" dirty="0"/>
+              <a:t> (2011–2012): Power-aware cloud data </a:t>
+            </a:r>
+            <a:r>
+              <a:rPr lang="en-IN" dirty="0" err="1"/>
+              <a:t>center</a:t>
+            </a:r>
+            <a:r>
+              <a:rPr lang="en-IN" dirty="0"/>
+              <a:t> optimization.</a:t>
+            </a:r>
+          </a:p>
+          <a:p>
+            <a:r>
+              <a:rPr lang="en-IN" dirty="0"/>
+              <a:t>Arshad et al. (2022): SLA reduction through dynamic consolidation.</a:t>
+            </a:r>
+          </a:p>
+          <a:p>
+            <a:endParaRPr dirty="0"/>
+          </a:p>
+        </p:txBody>
+      </p:sp>
+    </p:spTree>
+  </p:cSld>
+  <p:clrMapOvr>
+    <a:masterClrMapping/>
+  </p:clrMapOvr>
+</p:sld>
+</file>
+
+<file path=ppt/slides/slide16.xml><?xml version="1.0" encoding="utf-8"?>
+<p:sld xmlns:a="http://schemas.openxmlformats.org/drawingml/2006/main" xmlns:r="http://schemas.openxmlformats.org/officeDocument/2006/relationships" xmlns:p="http://schemas.openxmlformats.org/presentationml/2006/main">
+  <p:cSld>
+    <p:spTree>
+      <p:nvGrpSpPr>
+        <p:cNvPr id="1" name=""/>
+        <p:cNvGrpSpPr/>
+        <p:nvPr/>
+      </p:nvGrpSpPr>
+      <p:grpSpPr>
+        <a:xfrm>
+          <a:off x="0" y="0"/>
+          <a:ext cx="0" cy="0"/>
+          <a:chOff x="0" y="0"/>
+          <a:chExt cx="0" cy="0"/>
+        </a:xfrm>
+      </p:grpSpPr>
+      <p:sp>
+        <p:nvSpPr>
+          <p:cNvPr id="2" name="Title 1"/>
+          <p:cNvSpPr>
+            <a:spLocks noGrp="1"/>
+          </p:cNvSpPr>
+          <p:nvPr>
+            <p:ph type="title"/>
+          </p:nvPr>
+        </p:nvSpPr>
+        <p:spPr/>
+        <p:txBody>
+          <a:bodyPr/>
+          <a:lstStyle/>
+          <a:p>
+            <a:r>
               <a:t>Thank You</a:t>
             </a:r>
           </a:p>
@@ -4270,12 +4923,15 @@
           <a:bodyPr/>
           <a:lstStyle/>
           <a:p>
-            <a:endParaRPr dirty="0"/>
-          </a:p>
-          <a:p>
-            <a:r>
-              <a:rPr dirty="0"/>
-              <a:t>Questions?</a:t>
+            <a:r>
+              <a:rPr lang="en-US" dirty="0"/>
+              <a:t>End of Presentation.</a:t>
+            </a:r>
+          </a:p>
+          <a:p>
+            <a:r>
+              <a:rPr lang="en-US" dirty="0"/>
+              <a:t>Open for evaluation and discussion.</a:t>
             </a:r>
           </a:p>
           <a:p>
@@ -4313,7 +4969,13 @@
       </p:grpSpPr>
       <p:sp>
         <p:nvSpPr>
-          <p:cNvPr id="2" name="Title 1"/>
+          <p:cNvPr id="2" name="Title 1">
+            <a:extLst>
+              <a:ext uri="{FF2B5EF4-FFF2-40B4-BE49-F238E27FC236}">
+                <a16:creationId xmlns:a16="http://schemas.microsoft.com/office/drawing/2014/main" id="{59EFC58E-E15A-985A-C5A1-8134FB40E4A8}"/>
+              </a:ext>
+            </a:extLst>
+          </p:cNvPr>
           <p:cNvSpPr>
             <a:spLocks noGrp="1"/>
           </p:cNvSpPr>
@@ -4327,46 +4989,99 @@
           <a:lstStyle/>
           <a:p>
             <a:r>
+              <a:rPr lang="en-IN" dirty="0"/>
+              <a:t>Outline</a:t>
+            </a:r>
+            <a:br>
+              <a:rPr lang="en-IN" dirty="0"/>
+            </a:br>
+            <a:endParaRPr lang="en-IN" dirty="0"/>
+          </a:p>
+        </p:txBody>
+      </p:sp>
+      <p:sp>
+        <p:nvSpPr>
+          <p:cNvPr id="3" name="Content Placeholder 2">
+            <a:extLst>
+              <a:ext uri="{FF2B5EF4-FFF2-40B4-BE49-F238E27FC236}">
+                <a16:creationId xmlns:a16="http://schemas.microsoft.com/office/drawing/2014/main" id="{CBE94369-5CC7-898B-0406-81C5F5F47402}"/>
+              </a:ext>
+            </a:extLst>
+          </p:cNvPr>
+          <p:cNvSpPr>
+            <a:spLocks noGrp="1"/>
+          </p:cNvSpPr>
+          <p:nvPr>
+            <p:ph idx="1"/>
+          </p:nvPr>
+        </p:nvSpPr>
+        <p:spPr>
+          <a:xfrm>
+            <a:off x="1443491" y="2015733"/>
+            <a:ext cx="6571343" cy="3834734"/>
+          </a:xfrm>
+        </p:spPr>
+        <p:txBody>
+          <a:bodyPr>
+            <a:normAutofit lnSpcReduction="10000"/>
+          </a:bodyPr>
+          <a:lstStyle/>
+          <a:p>
+            <a:r>
+              <a:rPr lang="en-IN" dirty="0"/>
               <a:t>Introduction</a:t>
             </a:r>
           </a:p>
-        </p:txBody>
-      </p:sp>
-      <p:sp>
-        <p:nvSpPr>
-          <p:cNvPr id="3" name="Content Placeholder 2"/>
-          <p:cNvSpPr>
-            <a:spLocks noGrp="1"/>
-          </p:cNvSpPr>
-          <p:nvPr>
-            <p:ph idx="1"/>
-          </p:nvPr>
-        </p:nvSpPr>
-        <p:spPr/>
-        <p:txBody>
-          <a:bodyPr/>
-          <a:lstStyle/>
-          <a:p>
-            <a:endParaRPr/>
-          </a:p>
-          <a:p>
-            <a:r>
-              <a:t>Cloud computing provides on-demand access to computational resources.</a:t>
-            </a:r>
-          </a:p>
-          <a:p>
-            <a:r>
-              <a:t>High energy consumption in data centers poses environmental and cost challenges.</a:t>
-            </a:r>
-          </a:p>
-          <a:p>
-            <a:r>
-              <a:t>Virtual Machine (VM) consolidation helps reduce power usage and maintain Quality of Service (QoS).</a:t>
+          <a:p>
+            <a:r>
+              <a:rPr lang="en-IN" dirty="0"/>
+              <a:t>Literature Review</a:t>
+            </a:r>
+          </a:p>
+          <a:p>
+            <a:r>
+              <a:rPr lang="en-IN" dirty="0"/>
+              <a:t>Problem Statement</a:t>
+            </a:r>
+          </a:p>
+          <a:p>
+            <a:r>
+              <a:rPr lang="en-IN" dirty="0"/>
+              <a:t>Objectives </a:t>
+            </a:r>
+          </a:p>
+          <a:p>
+            <a:r>
+              <a:rPr lang="en-IN" dirty="0"/>
+              <a:t>Proposed Methodology</a:t>
+            </a:r>
+          </a:p>
+          <a:p>
+            <a:r>
+              <a:rPr lang="en-IN" dirty="0"/>
+              <a:t>Result</a:t>
+            </a:r>
+          </a:p>
+          <a:p>
+            <a:r>
+              <a:rPr lang="en-IN" dirty="0"/>
+              <a:t>Outcome</a:t>
+            </a:r>
+          </a:p>
+          <a:p>
+            <a:r>
+              <a:rPr lang="en-IN" dirty="0"/>
+              <a:t>References</a:t>
             </a:r>
           </a:p>
         </p:txBody>
       </p:sp>
     </p:spTree>
+    <p:extLst>
+      <p:ext uri="{BB962C8B-B14F-4D97-AF65-F5344CB8AC3E}">
+        <p14:creationId xmlns:p14="http://schemas.microsoft.com/office/powerpoint/2010/main" val="797098702"/>
+      </p:ext>
+    </p:extLst>
   </p:cSld>
   <p:clrMapOvr>
     <a:masterClrMapping/>
@@ -4407,7 +5122,7 @@
           <a:lstStyle/>
           <a:p>
             <a:r>
-              <a:t>Background</a:t>
+              <a:t>Introduction</a:t>
             </a:r>
           </a:p>
         </p:txBody>
@@ -4424,25 +5139,42 @@
         </p:nvSpPr>
         <p:spPr/>
         <p:txBody>
-          <a:bodyPr/>
-          <a:lstStyle/>
-          <a:p>
-            <a:endParaRPr/>
-          </a:p>
-          <a:p>
-            <a:r>
-              <a:t>OpenStack Neat framework uses Modified Best-Fit Decreasing (MBFD) for VM placement.</a:t>
-            </a:r>
-          </a:p>
-          <a:p>
-            <a:r>
-              <a:t>Existing methods face inefficiencies in energy use and SLA compliance.</a:t>
-            </a:r>
-          </a:p>
-          <a:p>
-            <a:r>
-              <a:t>EEVMC introduces a host selection criterion based on incurred loss during VM placement.</a:t>
-            </a:r>
+          <a:bodyPr>
+            <a:normAutofit fontScale="92500" lnSpcReduction="20000"/>
+          </a:bodyPr>
+          <a:lstStyle/>
+          <a:p>
+            <a:r>
+              <a:rPr lang="en-IN" dirty="0"/>
+              <a:t>Cloud computing provides scalable access to computational resources.</a:t>
+            </a:r>
+          </a:p>
+          <a:p>
+            <a:r>
+              <a:rPr lang="en-IN" dirty="0"/>
+              <a:t>Rising workload demand has increased energy usage in data centres .</a:t>
+            </a:r>
+          </a:p>
+          <a:p>
+            <a:r>
+              <a:rPr lang="en-IN" dirty="0"/>
+              <a:t>VM consolidation shuts down idle hosts to reduce power consumption.</a:t>
+            </a:r>
+          </a:p>
+          <a:p>
+            <a:r>
+              <a:rPr lang="en-IN" dirty="0"/>
+              <a:t>Challenge: conserve energy without performance degradation.</a:t>
+            </a:r>
+          </a:p>
+          <a:p>
+            <a:r>
+              <a:rPr lang="en-IN" dirty="0"/>
+              <a:t>EEVMC attempts to solve this with an intelligent placement framework.</a:t>
+            </a:r>
+          </a:p>
+          <a:p>
+            <a:endParaRPr dirty="0"/>
           </a:p>
         </p:txBody>
       </p:sp>
@@ -4504,25 +5236,42 @@
         </p:nvSpPr>
         <p:spPr/>
         <p:txBody>
-          <a:bodyPr/>
-          <a:lstStyle/>
-          <a:p>
-            <a:endParaRPr/>
-          </a:p>
-          <a:p>
-            <a:r>
-              <a:t>VM Consolidation is an NP-hard optimization problem.</a:t>
-            </a:r>
-          </a:p>
-          <a:p>
-            <a:r>
-              <a:t>Approaches used: Integer Linear Programming (ILP), Particle Swarm Optimization (PSO), Dynamic Programming, etc.</a:t>
-            </a:r>
-          </a:p>
-          <a:p>
-            <a:r>
-              <a:t>Power-aware and SLA-compliant consolidation strategies are widely studied.</a:t>
-            </a:r>
+          <a:bodyPr>
+            <a:normAutofit fontScale="92500" lnSpcReduction="20000"/>
+          </a:bodyPr>
+          <a:lstStyle/>
+          <a:p>
+            <a:r>
+              <a:rPr lang="en-IN" dirty="0"/>
+              <a:t>VM consolidation classified as NP-hard due to combinatorial placement complexity.</a:t>
+            </a:r>
+          </a:p>
+          <a:p>
+            <a:r>
+              <a:rPr lang="en-IN" dirty="0"/>
+              <a:t>Classical methods: Best Fit, First Fit, MBFD, PABFD.</a:t>
+            </a:r>
+          </a:p>
+          <a:p>
+            <a:r>
+              <a:rPr lang="en-IN" dirty="0"/>
+              <a:t>Heuristic extensions improve energy efficiency using scoring models.</a:t>
+            </a:r>
+          </a:p>
+          <a:p>
+            <a:r>
+              <a:rPr lang="en-IN" dirty="0"/>
+              <a:t>Meta-heuristics like GA, PSO, ILP optimize placement at higher cost.</a:t>
+            </a:r>
+          </a:p>
+          <a:p>
+            <a:r>
+              <a:rPr lang="en-IN" dirty="0"/>
+              <a:t>ML-based models predict workload fluctuations for better decisions.</a:t>
+            </a:r>
+          </a:p>
+          <a:p>
+            <a:endParaRPr dirty="0"/>
           </a:p>
         </p:txBody>
       </p:sp>
@@ -4584,25 +5333,45 @@
         </p:nvSpPr>
         <p:spPr/>
         <p:txBody>
-          <a:bodyPr/>
-          <a:lstStyle/>
-          <a:p>
-            <a:endParaRPr/>
-          </a:p>
-          <a:p>
-            <a:r>
-              <a:t>Existing algorithms like MBFD, PABFD, and PEBFD optimize energy but increase SLA violations.</a:t>
-            </a:r>
-          </a:p>
-          <a:p>
-            <a:r>
-              <a:t>Recent heuristics such as PEFFD and MFPED improve host efficiency but need further enhancement.</a:t>
-            </a:r>
-          </a:p>
-          <a:p>
-            <a:r>
-              <a:t>Deep learning integration can predict workloads to optimize VM placement dynamically.</a:t>
-            </a:r>
+          <a:bodyPr>
+            <a:normAutofit fontScale="92500" lnSpcReduction="20000"/>
+          </a:bodyPr>
+          <a:lstStyle/>
+          <a:p>
+            <a:r>
+              <a:rPr lang="en-IN" dirty="0"/>
+              <a:t>MBFD and PABFD effective for static workloads but fail under spikes.</a:t>
+            </a:r>
+          </a:p>
+          <a:p>
+            <a:r>
+              <a:rPr lang="en-IN" dirty="0"/>
+              <a:t>PEFFD and MFPED introduce host-efficiency scoring for improved balance.</a:t>
+            </a:r>
+          </a:p>
+          <a:p>
+            <a:r>
+              <a:rPr lang="en-IN" dirty="0"/>
+              <a:t>Deep learning models help forecast CPU demand and avoid overload.</a:t>
+            </a:r>
+          </a:p>
+          <a:p>
+            <a:r>
+              <a:rPr lang="en-IN" dirty="0"/>
+              <a:t>Reinforcement learning frameworks learn optimal placements over time.</a:t>
+            </a:r>
+          </a:p>
+          <a:p>
+            <a:r>
+              <a:rPr lang="en-IN" dirty="0"/>
+              <a:t>Despite progress, computational complexity remains a barrier.</a:t>
+            </a:r>
+          </a:p>
+          <a:p>
+            <a:endParaRPr lang="en-IN" dirty="0"/>
+          </a:p>
+          <a:p>
+            <a:endParaRPr dirty="0"/>
           </a:p>
         </p:txBody>
       </p:sp>
@@ -4647,6 +5416,7 @@
           <a:lstStyle/>
           <a:p>
             <a:r>
+              <a:rPr dirty="0"/>
               <a:t>Problem Statement</a:t>
             </a:r>
           </a:p>
@@ -4664,15 +5434,42 @@
         </p:nvSpPr>
         <p:spPr/>
         <p:txBody>
-          <a:bodyPr/>
-          <a:lstStyle/>
-          <a:p>
-            <a:endParaRPr/>
-          </a:p>
-          <a:p>
-            <a:r>
-              <a:t>To reduce energy consumption and SLA violations in cloud data centers through optimized VM consolidation.</a:t>
-            </a:r>
+          <a:bodyPr>
+            <a:normAutofit fontScale="92500" lnSpcReduction="20000"/>
+          </a:bodyPr>
+          <a:lstStyle/>
+          <a:p>
+            <a:r>
+              <a:rPr lang="en-IN" dirty="0"/>
+              <a:t>Cloud data centres face rising energy consumption and operational cost.</a:t>
+            </a:r>
+          </a:p>
+          <a:p>
+            <a:r>
+              <a:rPr lang="en-IN" dirty="0"/>
+              <a:t>Inefficient VM placement triggers host overload and SLA violations.</a:t>
+            </a:r>
+          </a:p>
+          <a:p>
+            <a:r>
+              <a:rPr lang="en-IN" dirty="0"/>
+              <a:t>Existing techniques lack adaptability to dynamic workloads.</a:t>
+            </a:r>
+          </a:p>
+          <a:p>
+            <a:r>
+              <a:rPr lang="en-IN" dirty="0"/>
+              <a:t>A balanced, scalable and efficient VM consolidation strategy is required.</a:t>
+            </a:r>
+          </a:p>
+          <a:p>
+            <a:r>
+              <a:rPr lang="en-IN" dirty="0"/>
+              <a:t>EEVMC aims to minimize energy loss while maintaining stable performance.</a:t>
+            </a:r>
+          </a:p>
+          <a:p>
+            <a:endParaRPr dirty="0"/>
           </a:p>
         </p:txBody>
       </p:sp>
@@ -4717,7 +5514,7 @@
           <a:lstStyle/>
           <a:p>
             <a:r>
-              <a:t>Proposed Solution</a:t>
+              <a:t>Objectives</a:t>
             </a:r>
           </a:p>
         </p:txBody>
@@ -4734,32 +5531,40 @@
         </p:nvSpPr>
         <p:spPr/>
         <p:txBody>
-          <a:bodyPr>
-            <a:normAutofit lnSpcReduction="10000"/>
-          </a:bodyPr>
-          <a:lstStyle/>
-          <a:p>
-            <a:endParaRPr/>
-          </a:p>
-          <a:p>
-            <a:r>
-              <a:t>EEVMC uses a novel Loss-Aware Performance Efficient Decreasing (LAPED) algorithm.</a:t>
-            </a:r>
-          </a:p>
-          <a:p>
-            <a:r>
-              <a:t>Classifies hosts as active or inactive based on utilization and power consumption.</a:t>
-            </a:r>
-          </a:p>
-          <a:p>
-            <a:r>
-              <a:t>Selects the host with minimum loss for VM placement.</a:t>
-            </a:r>
-          </a:p>
-          <a:p>
-            <a:r>
-              <a:t>Simulated using CloudSim toolkit on PlanetLab and Materna workloads.</a:t>
-            </a:r>
+          <a:bodyPr/>
+          <a:lstStyle/>
+          <a:p>
+            <a:r>
+              <a:rPr lang="en-IN" dirty="0"/>
+              <a:t>Minimize overall energy consumption across cloud hosts.</a:t>
+            </a:r>
+          </a:p>
+          <a:p>
+            <a:r>
+              <a:rPr lang="en-IN" dirty="0"/>
+              <a:t>Reduce SLA violations occurring due to overutilization.</a:t>
+            </a:r>
+          </a:p>
+          <a:p>
+            <a:r>
+              <a:rPr lang="en-IN" dirty="0"/>
+              <a:t>Enhance average host utilization through balanced workload placement.</a:t>
+            </a:r>
+          </a:p>
+          <a:p>
+            <a:r>
+              <a:rPr lang="en-IN" dirty="0"/>
+              <a:t>Lower VM migration frequency to reduce network overhead.</a:t>
+            </a:r>
+          </a:p>
+          <a:p>
+            <a:r>
+              <a:rPr lang="en-IN" dirty="0"/>
+              <a:t>Develop a loss-based multi-factor evaluation strategy.</a:t>
+            </a:r>
+          </a:p>
+          <a:p>
+            <a:endParaRPr dirty="0"/>
           </a:p>
         </p:txBody>
       </p:sp>
@@ -4804,8 +5609,17 @@
           <a:lstStyle/>
           <a:p>
             <a:r>
-              <a:t>Objectives</a:t>
-            </a:r>
+              <a:rPr dirty="0"/>
+              <a:t>Proposed </a:t>
+            </a:r>
+            <a:r>
+              <a:rPr lang="en-IN" dirty="0"/>
+              <a:t>Methodology</a:t>
+            </a:r>
+            <a:br>
+              <a:rPr lang="en-IN" dirty="0"/>
+            </a:br>
+            <a:endParaRPr dirty="0"/>
           </a:p>
         </p:txBody>
       </p:sp>
@@ -4821,30 +5635,42 @@
         </p:nvSpPr>
         <p:spPr/>
         <p:txBody>
-          <a:bodyPr/>
-          <a:lstStyle/>
-          <a:p>
-            <a:endParaRPr/>
-          </a:p>
-          <a:p>
-            <a:r>
-              <a:t>Minimize power consumption in cloud data centers.</a:t>
-            </a:r>
-          </a:p>
-          <a:p>
-            <a:r>
-              <a:t>Reduce SLA violations during VM migration.</a:t>
-            </a:r>
-          </a:p>
-          <a:p>
-            <a:r>
-              <a:t>Improve overall resource utilization and system performance.</a:t>
-            </a:r>
-          </a:p>
-          <a:p>
-            <a:r>
-              <a:t>Ensure adaptability across heterogeneous cloud environments.</a:t>
-            </a:r>
+          <a:bodyPr>
+            <a:normAutofit lnSpcReduction="10000"/>
+          </a:bodyPr>
+          <a:lstStyle/>
+          <a:p>
+            <a:r>
+              <a:rPr lang="en-US" dirty="0"/>
+              <a:t>Uses Loss-Aware Performance Efficient Decreasing (LAPED) approach.</a:t>
+            </a:r>
+          </a:p>
+          <a:p>
+            <a:r>
+              <a:rPr lang="en-US" dirty="0"/>
+              <a:t>Evaluates active and inactive hosts using a unified loss metric.</a:t>
+            </a:r>
+          </a:p>
+          <a:p>
+            <a:r>
+              <a:rPr lang="en-US" dirty="0"/>
+              <a:t>Loss metric includes CPU usage, power ratio, and activation cost.</a:t>
+            </a:r>
+          </a:p>
+          <a:p>
+            <a:r>
+              <a:rPr lang="en-US" dirty="0"/>
+              <a:t>Selects the host with minimum loss value for VM placement.</a:t>
+            </a:r>
+          </a:p>
+          <a:p>
+            <a:r>
+              <a:rPr lang="en-US" dirty="0"/>
+              <a:t>Reduces unnecessary migrations and improves SLA stability.</a:t>
+            </a:r>
+          </a:p>
+          <a:p>
+            <a:endParaRPr dirty="0"/>
           </a:p>
         </p:txBody>
       </p:sp>
@@ -4875,7 +5701,13 @@
       </p:grpSpPr>
       <p:sp>
         <p:nvSpPr>
-          <p:cNvPr id="2" name="Title 1"/>
+          <p:cNvPr id="2" name="Title 1">
+            <a:extLst>
+              <a:ext uri="{FF2B5EF4-FFF2-40B4-BE49-F238E27FC236}">
+                <a16:creationId xmlns:a16="http://schemas.microsoft.com/office/drawing/2014/main" id="{2DDD6D98-3EE4-5136-80A7-E34C3C24D6C7}"/>
+              </a:ext>
+            </a:extLst>
+          </p:cNvPr>
           <p:cNvSpPr>
             <a:spLocks noGrp="1"/>
           </p:cNvSpPr>
@@ -4889,14 +5721,29 @@
           <a:lstStyle/>
           <a:p>
             <a:r>
-              <a:t>Conclusion and Future Work</a:t>
-            </a:r>
-          </a:p>
-        </p:txBody>
-      </p:sp>
-      <p:sp>
-        <p:nvSpPr>
-          <p:cNvPr id="3" name="Content Placeholder 2"/>
+              <a:rPr lang="en-IN" dirty="0"/>
+              <a:t>Proposed Methodology</a:t>
+            </a:r>
+            <a:br>
+              <a:rPr lang="en-IN" dirty="0"/>
+            </a:br>
+            <a:r>
+              <a:rPr lang="en-IN" sz="2800" dirty="0"/>
+              <a:t>step 1: host monitoring</a:t>
+            </a:r>
+            <a:endParaRPr lang="en-IN" dirty="0"/>
+          </a:p>
+        </p:txBody>
+      </p:sp>
+      <p:sp>
+        <p:nvSpPr>
+          <p:cNvPr id="3" name="Content Placeholder 2">
+            <a:extLst>
+              <a:ext uri="{FF2B5EF4-FFF2-40B4-BE49-F238E27FC236}">
+                <a16:creationId xmlns:a16="http://schemas.microsoft.com/office/drawing/2014/main" id="{1C18DBE4-36FD-891D-483C-9F7139F2033D}"/>
+              </a:ext>
+            </a:extLst>
+          </p:cNvPr>
           <p:cNvSpPr>
             <a:spLocks noGrp="1"/>
           </p:cNvSpPr>
@@ -4909,26 +5756,43 @@
           <a:bodyPr/>
           <a:lstStyle/>
           <a:p>
-            <a:endParaRPr/>
-          </a:p>
-          <a:p>
-            <a:r>
-              <a:t>EEVMC offers an energy-efficient and SLA-compliant consolidation method.</a:t>
-            </a:r>
-          </a:p>
-          <a:p>
-            <a:r>
-              <a:t>Improves QoS and sustainability of cloud systems.</a:t>
-            </a:r>
-          </a:p>
-          <a:p>
-            <a:r>
-              <a:t>Future work: Integrate reinforcement learning for adaptive host selection.</a:t>
-            </a:r>
+            <a:r>
+              <a:rPr lang="en-US" dirty="0"/>
+              <a:t>Monitor CPU utilization of all hosts</a:t>
+            </a:r>
+          </a:p>
+          <a:p>
+            <a:r>
+              <a:rPr lang="en-US" dirty="0"/>
+              <a:t>Identify underutilized and overutilized hosts</a:t>
+            </a:r>
+          </a:p>
+          <a:p>
+            <a:r>
+              <a:rPr lang="en-US" dirty="0"/>
+              <a:t>Analyze workload behavior</a:t>
+            </a:r>
+          </a:p>
+          <a:p>
+            <a:r>
+              <a:rPr lang="en-US" dirty="0"/>
+              <a:t>To improve resource allocation</a:t>
+            </a:r>
+          </a:p>
+          <a:p>
+            <a:pPr marL="0" indent="0">
+              <a:buNone/>
+            </a:pPr>
+            <a:endParaRPr lang="en-IN" dirty="0"/>
           </a:p>
         </p:txBody>
       </p:sp>
     </p:spTree>
+    <p:extLst>
+      <p:ext uri="{BB962C8B-B14F-4D97-AF65-F5344CB8AC3E}">
+        <p14:creationId xmlns:p14="http://schemas.microsoft.com/office/powerpoint/2010/main" val="3337521688"/>
+      </p:ext>
+    </p:extLst>
   </p:cSld>
   <p:clrMapOvr>
     <a:masterClrMapping/>
